--- a/docs/hr/chi-erp-workflow.pptx
+++ b/docs/hr/chi-erp-workflow.pptx
@@ -2158,7 +2158,7 @@
         <p:spPr>
           <a:xfrm>
             <a:off x="822960" y="4572000"/>
-            <a:ext cx="1051560" cy="347472"/>
+            <a:ext cx="1371600" cy="384048"/>
           </a:xfrm>
           <a:prstGeom prst="roundRect">
             <a:avLst>
@@ -2171,7 +2171,9 @@
           <a:ln/>
         </p:spPr>
         <p:txBody>
-          <a:bodyPr wrap="square" lIns="0" tIns="0" rIns="0" bIns="0" rtlCol="0" anchor="ctr"/>
+          <a:bodyPr wrap="square" lIns="0" tIns="0" rIns="0" bIns="0" rtlCol="0" anchor="ctr">
+            <a:normAutofit/>
+          </a:bodyPr>
           <a:lstStyle/>
           <a:p>
             <a:pPr algn="ctr" indent="0" marL="0">
@@ -2186,7 +2188,7 @@
                 <a:ea typeface="Microsoft JhengHei" pitchFamily="34" charset="-122"/>
                 <a:cs typeface="Microsoft JhengHei" pitchFamily="34" charset="-120"/>
               </a:rPr>
-              <a:t>Maggie</a:t>
+              <a:t>後勤行政</a:t>
             </a:r>
             <a:endParaRPr lang="en-US" sz="1200" dirty="0"/>
           </a:p>
@@ -2201,7 +2203,7 @@
         <p:spPr>
           <a:xfrm>
             <a:off x="2057400" y="4572000"/>
-            <a:ext cx="1051560" cy="347472"/>
+            <a:ext cx="1371600" cy="384048"/>
           </a:xfrm>
           <a:prstGeom prst="roundRect">
             <a:avLst>
@@ -2214,7 +2216,9 @@
           <a:ln/>
         </p:spPr>
         <p:txBody>
-          <a:bodyPr wrap="square" lIns="0" tIns="0" rIns="0" bIns="0" rtlCol="0" anchor="ctr"/>
+          <a:bodyPr wrap="square" lIns="0" tIns="0" rIns="0" bIns="0" rtlCol="0" anchor="ctr">
+            <a:normAutofit/>
+          </a:bodyPr>
           <a:lstStyle/>
           <a:p>
             <a:pPr algn="ctr" indent="0" marL="0">
@@ -2229,7 +2233,7 @@
                 <a:ea typeface="Microsoft JhengHei" pitchFamily="34" charset="-122"/>
                 <a:cs typeface="Microsoft JhengHei" pitchFamily="34" charset="-120"/>
               </a:rPr>
-              <a:t>小民</a:t>
+              <a:t>電商營運</a:t>
             </a:r>
             <a:endParaRPr lang="en-US" sz="1200" dirty="0"/>
           </a:p>
@@ -2244,7 +2248,7 @@
         <p:spPr>
           <a:xfrm>
             <a:off x="3291840" y="4572000"/>
-            <a:ext cx="1051560" cy="347472"/>
+            <a:ext cx="1371600" cy="384048"/>
           </a:xfrm>
           <a:prstGeom prst="roundRect">
             <a:avLst>
@@ -2257,7 +2261,9 @@
           <a:ln/>
         </p:spPr>
         <p:txBody>
-          <a:bodyPr wrap="square" lIns="0" tIns="0" rIns="0" bIns="0" rtlCol="0" anchor="ctr"/>
+          <a:bodyPr wrap="square" lIns="0" tIns="0" rIns="0" bIns="0" rtlCol="0" anchor="ctr">
+            <a:normAutofit/>
+          </a:bodyPr>
           <a:lstStyle/>
           <a:p>
             <a:pPr algn="ctr" indent="0" marL="0">
@@ -2272,7 +2278,7 @@
                 <a:ea typeface="Microsoft JhengHei" pitchFamily="34" charset="-122"/>
                 <a:cs typeface="Microsoft JhengHei" pitchFamily="34" charset="-120"/>
               </a:rPr>
-              <a:t>Una</a:t>
+              <a:t>行政協助</a:t>
             </a:r>
             <a:endParaRPr lang="en-US" sz="1200" dirty="0"/>
           </a:p>
@@ -2287,7 +2293,7 @@
         <p:spPr>
           <a:xfrm>
             <a:off x="4526280" y="4572000"/>
-            <a:ext cx="1051560" cy="347472"/>
+            <a:ext cx="1371600" cy="384048"/>
           </a:xfrm>
           <a:prstGeom prst="roundRect">
             <a:avLst>
@@ -2300,7 +2306,9 @@
           <a:ln/>
         </p:spPr>
         <p:txBody>
-          <a:bodyPr wrap="square" lIns="0" tIns="0" rIns="0" bIns="0" rtlCol="0" anchor="ctr"/>
+          <a:bodyPr wrap="square" lIns="0" tIns="0" rIns="0" bIns="0" rtlCol="0" anchor="ctr">
+            <a:normAutofit/>
+          </a:bodyPr>
           <a:lstStyle/>
           <a:p>
             <a:pPr algn="ctr" indent="0" marL="0">
@@ -2315,7 +2323,7 @@
                 <a:ea typeface="Microsoft JhengHei" pitchFamily="34" charset="-122"/>
                 <a:cs typeface="Microsoft JhengHei" pitchFamily="34" charset="-120"/>
               </a:rPr>
-              <a:t>Abby</a:t>
+              <a:t>倉儲</a:t>
             </a:r>
             <a:endParaRPr lang="en-US" sz="1200" dirty="0"/>
           </a:p>
@@ -2354,7 +2362,7 @@
                 <a:ea typeface="Microsoft JhengHei" pitchFamily="34" charset="-122"/>
                 <a:cs typeface="Microsoft JhengHei" pitchFamily="34" charset="-120"/>
               </a:rPr>
-              <a:t>v1.0|2026-08-09|維護:Frankie</a:t>
+              <a:t>v1.0|2026-08-09|維護:營運管理</a:t>
             </a:r>
             <a:endParaRPr lang="en-US" sz="1100" dirty="0"/>
           </a:p>
@@ -2425,7 +2433,7 @@
                 <a:ea typeface="Microsoft JhengHei" pitchFamily="34" charset="-122"/>
                 <a:cs typeface="Microsoft JhengHei" pitchFamily="34" charset="-120"/>
               </a:rPr>
-              <a:t>Abby × Maggie|盤點流程</a:t>
+              <a:t>倉儲 × 後勤行政|盤點流程</a:t>
             </a:r>
             <a:endParaRPr lang="en-US" sz="2800" dirty="0"/>
           </a:p>
@@ -2464,7 +2472,7 @@
                 <a:ea typeface="Microsoft JhengHei" pitchFamily="34" charset="-122"/>
                 <a:cs typeface="Microsoft JhengHei" pitchFamily="34" charset="-120"/>
               </a:rPr>
-              <a:t>模組:庫存管理|循環盤點每週(Abby)/月盤每月底(Abby+Maggie)</a:t>
+              <a:t>模組:庫存管理|循環盤點每週(倉儲)/月盤每月底(倉儲+後勤行政)</a:t>
             </a:r>
             <a:endParaRPr lang="en-US" sz="1200" dirty="0"/>
           </a:p>
@@ -2492,7 +2500,9 @@
           <a:ln/>
         </p:spPr>
         <p:txBody>
-          <a:bodyPr wrap="square" lIns="762" tIns="762" rIns="762" bIns="762" rtlCol="0" anchor="ctr"/>
+          <a:bodyPr wrap="square" lIns="762" tIns="762" rIns="762" bIns="762" rtlCol="0" anchor="ctr">
+            <a:normAutofit/>
+          </a:bodyPr>
           <a:lstStyle/>
           <a:p>
             <a:pPr algn="ctr" indent="0" marL="0">
@@ -2578,7 +2588,9 @@
           <a:ln/>
         </p:spPr>
         <p:txBody>
-          <a:bodyPr wrap="square" lIns="762" tIns="762" rIns="762" bIns="762" rtlCol="0" anchor="ctr"/>
+          <a:bodyPr wrap="square" lIns="762" tIns="762" rIns="762" bIns="762" rtlCol="0" anchor="ctr">
+            <a:normAutofit/>
+          </a:bodyPr>
           <a:lstStyle/>
           <a:p>
             <a:pPr algn="ctr" indent="0" marL="0">
@@ -2616,7 +2628,7 @@
                 <a:ea typeface="Microsoft JhengHei" pitchFamily="34" charset="-122"/>
                 <a:cs typeface="Microsoft JhengHei" pitchFamily="34" charset="-120"/>
               </a:rPr>
-              <a:t>列印盤點表,實點填數(Abby)</a:t>
+              <a:t>列印盤點表,實點填數(倉儲)</a:t>
             </a:r>
             <a:endParaRPr lang="en-US" sz="1300" dirty="0"/>
           </a:p>
@@ -2664,7 +2676,9 @@
           <a:ln/>
         </p:spPr>
         <p:txBody>
-          <a:bodyPr wrap="square" lIns="762" tIns="762" rIns="762" bIns="762" rtlCol="0" anchor="ctr"/>
+          <a:bodyPr wrap="square" lIns="762" tIns="762" rIns="762" bIns="762" rtlCol="0" anchor="ctr">
+            <a:normAutofit/>
+          </a:bodyPr>
           <a:lstStyle/>
           <a:p>
             <a:pPr algn="ctr" indent="0" marL="0">
@@ -2702,7 +2716,7 @@
                 <a:ea typeface="Microsoft JhengHei" pitchFamily="34" charset="-122"/>
                 <a:cs typeface="Microsoft JhengHei" pitchFamily="34" charset="-120"/>
               </a:rPr>
-              <a:t>盤點數 vs 系統帳(Maggie)</a:t>
+              <a:t>盤點數 vs 系統帳(後勤行政)</a:t>
             </a:r>
             <a:endParaRPr lang="en-US" sz="1300" dirty="0"/>
           </a:p>
@@ -2750,7 +2764,9 @@
           <a:ln/>
         </p:spPr>
         <p:txBody>
-          <a:bodyPr wrap="square" lIns="762" tIns="762" rIns="762" bIns="762" rtlCol="0" anchor="ctr"/>
+          <a:bodyPr wrap="square" lIns="762" tIns="762" rIns="762" bIns="762" rtlCol="0" anchor="ctr">
+            <a:normAutofit/>
+          </a:bodyPr>
           <a:lstStyle/>
           <a:p>
             <a:pPr algn="ctr" indent="0" marL="0">
@@ -2836,7 +2852,9 @@
           <a:ln/>
         </p:spPr>
         <p:txBody>
-          <a:bodyPr wrap="square" lIns="762" tIns="762" rIns="762" bIns="762" rtlCol="0" anchor="ctr"/>
+          <a:bodyPr wrap="square" lIns="762" tIns="762" rIns="762" bIns="762" rtlCol="0" anchor="ctr">
+            <a:normAutofit/>
+          </a:bodyPr>
           <a:lstStyle/>
           <a:p>
             <a:pPr algn="ctr" indent="0" marL="0">
@@ -2902,7 +2920,9 @@
           <a:ln/>
         </p:spPr>
         <p:txBody>
-          <a:bodyPr wrap="square" lIns="2286" tIns="2286" rIns="2286" bIns="2286" rtlCol="0" anchor="t"/>
+          <a:bodyPr wrap="square" lIns="2286" tIns="2286" rIns="2286" bIns="2286" rtlCol="0" anchor="t">
+            <a:normAutofit/>
+          </a:bodyPr>
           <a:lstStyle/>
           <a:p>
             <a:pPr indent="0" marL="0">
@@ -2962,7 +2982,7 @@
                 <a:ea typeface="Microsoft JhengHei" pitchFamily="34" charset="-122"/>
                 <a:cs typeface="Microsoft JhengHei" pitchFamily="34" charset="-120"/>
               </a:rPr>
-              <a:t>查無原因才開調整單,一律備註原因;由開單者以外之人覆核(Maggie 開立→Aaron 覆核),不自開自核</a:t>
+              <a:t>查無原因才開調整單,一律備註原因;由開單者以外之人覆核(後勤行政 開立→負責人 覆核),不自開自核</a:t>
             </a:r>
             <a:endParaRPr lang="en-US" sz="1400" dirty="0"/>
           </a:p>
@@ -2980,7 +3000,7 @@
                 <a:ea typeface="Microsoft JhengHei" pitchFamily="34" charset="-122"/>
                 <a:cs typeface="Microsoft JhengHei" pitchFamily="34" charset="-120"/>
               </a:rPr>
-              <a:t>月盤結果供 Maggie 做月底庫存帳務核對,也是採購決策的數字基礎</a:t>
+              <a:t>月盤結果供 後勤行政 做月底庫存帳務核對,也是採購決策的數字基礎</a:t>
             </a:r>
             <a:endParaRPr lang="en-US" sz="1400" dirty="0"/>
           </a:p>
@@ -3051,7 +3071,7 @@
                 <a:ea typeface="Microsoft JhengHei" pitchFamily="34" charset="-122"/>
                 <a:cs typeface="Microsoft JhengHei" pitchFamily="34" charset="-120"/>
               </a:rPr>
-              <a:t>Una|基本資料維護</a:t>
+              <a:t>行政協助|基本資料維護</a:t>
             </a:r>
             <a:endParaRPr lang="en-US" sz="2800" dirty="0"/>
           </a:p>
@@ -3090,7 +3110,7 @@
                 <a:ea typeface="Microsoft JhengHei" pitchFamily="34" charset="-122"/>
                 <a:cs typeface="Microsoft JhengHei" pitchFamily="34" charset="-120"/>
               </a:rPr>
-              <a:t>模組:基本資料|頻率:每日(有需求即建)|代理:Maggie</a:t>
+              <a:t>模組:基本資料|頻率:每日(有需求即建)|代理:後勤行政</a:t>
             </a:r>
             <a:endParaRPr lang="en-US" sz="1200" dirty="0"/>
           </a:p>
@@ -3118,7 +3138,9 @@
           <a:ln/>
         </p:spPr>
         <p:txBody>
-          <a:bodyPr wrap="square" lIns="762" tIns="762" rIns="762" bIns="762" rtlCol="0" anchor="ctr"/>
+          <a:bodyPr wrap="square" lIns="762" tIns="762" rIns="762" bIns="762" rtlCol="0" anchor="ctr">
+            <a:normAutofit/>
+          </a:bodyPr>
           <a:lstStyle/>
           <a:p>
             <a:pPr algn="ctr" indent="0" marL="0">
@@ -3156,7 +3178,7 @@
                 <a:ea typeface="Microsoft JhengHei" pitchFamily="34" charset="-122"/>
                 <a:cs typeface="Microsoft JhengHei" pitchFamily="34" charset="-120"/>
               </a:rPr>
-              <a:t>Maggie(供應商/商品)、小民(客戶/商品)</a:t>
+              <a:t>後勤行政(供應商/商品)、電商營運(客戶/商品)</a:t>
             </a:r>
             <a:endParaRPr lang="en-US" sz="1300" dirty="0"/>
           </a:p>
@@ -3204,7 +3226,9 @@
           <a:ln/>
         </p:spPr>
         <p:txBody>
-          <a:bodyPr wrap="square" lIns="762" tIns="762" rIns="762" bIns="762" rtlCol="0" anchor="ctr"/>
+          <a:bodyPr wrap="square" lIns="762" tIns="762" rIns="762" bIns="762" rtlCol="0" anchor="ctr">
+            <a:normAutofit/>
+          </a:bodyPr>
           <a:lstStyle/>
           <a:p>
             <a:pPr algn="ctr" indent="0" marL="0">
@@ -3290,7 +3314,9 @@
           <a:ln/>
         </p:spPr>
         <p:txBody>
-          <a:bodyPr wrap="square" lIns="762" tIns="762" rIns="762" bIns="762" rtlCol="0" anchor="ctr"/>
+          <a:bodyPr wrap="square" lIns="762" tIns="762" rIns="762" bIns="762" rtlCol="0" anchor="ctr">
+            <a:normAutofit/>
+          </a:bodyPr>
           <a:lstStyle/>
           <a:p>
             <a:pPr algn="ctr" indent="0" marL="0">
@@ -3376,7 +3402,9 @@
           <a:ln/>
         </p:spPr>
         <p:txBody>
-          <a:bodyPr wrap="square" lIns="762" tIns="762" rIns="762" bIns="762" rtlCol="0" anchor="ctr"/>
+          <a:bodyPr wrap="square" lIns="762" tIns="762" rIns="762" bIns="762" rtlCol="0" anchor="ctr">
+            <a:normAutofit/>
+          </a:bodyPr>
           <a:lstStyle/>
           <a:p>
             <a:pPr algn="ctr" indent="0" marL="0">
@@ -3442,7 +3470,9 @@
           <a:ln/>
         </p:spPr>
         <p:txBody>
-          <a:bodyPr wrap="square" lIns="2286" tIns="2286" rIns="2286" bIns="2286" rtlCol="0" anchor="t"/>
+          <a:bodyPr wrap="square" lIns="2286" tIns="2286" rIns="2286" bIns="2286" rtlCol="0" anchor="t">
+            <a:normAutofit/>
+          </a:bodyPr>
           <a:lstStyle/>
           <a:p>
             <a:pPr indent="0" marL="0">
@@ -3535,11 +3565,11 @@
         <p:spPr>
           <a:xfrm>
             <a:off x="548640" y="5349240"/>
-            <a:ext cx="11091672" cy="502920"/>
+            <a:ext cx="11091672" cy="548640"/>
           </a:xfrm>
           <a:prstGeom prst="roundRect">
             <a:avLst>
-              <a:gd name="adj" fmla="val 10909"/>
+              <a:gd name="adj" fmla="val 10000"/>
             </a:avLst>
           </a:prstGeom>
           <a:solidFill>
@@ -3548,7 +3578,9 @@
           <a:ln/>
         </p:spPr>
         <p:txBody>
-          <a:bodyPr wrap="square" lIns="1524" tIns="1524" rIns="1524" bIns="1524" rtlCol="0" anchor="ctr"/>
+          <a:bodyPr wrap="square" lIns="1524" tIns="1524" rIns="1524" bIns="1524" rtlCol="0" anchor="ctr">
+            <a:normAutofit/>
+          </a:bodyPr>
           <a:lstStyle/>
           <a:p>
             <a:pPr algn="l" indent="0" marL="0">
@@ -3701,7 +3733,9 @@
           <a:ln/>
         </p:spPr>
         <p:txBody>
-          <a:bodyPr wrap="square" lIns="2286" tIns="2286" rIns="2286" bIns="2286" rtlCol="0" anchor="ctr"/>
+          <a:bodyPr wrap="square" lIns="2286" tIns="2286" rIns="2286" bIns="2286" rtlCol="0" anchor="ctr">
+            <a:normAutofit/>
+          </a:bodyPr>
           <a:lstStyle/>
           <a:p>
             <a:pPr indent="0" marL="0">
@@ -3764,7 +3798,9 @@
           <a:ln/>
         </p:spPr>
         <p:txBody>
-          <a:bodyPr wrap="square" lIns="2286" tIns="2286" rIns="2286" bIns="2286" rtlCol="0" anchor="ctr"/>
+          <a:bodyPr wrap="square" lIns="2286" tIns="2286" rIns="2286" bIns="2286" rtlCol="0" anchor="ctr">
+            <a:normAutofit/>
+          </a:bodyPr>
           <a:lstStyle/>
           <a:p>
             <a:pPr indent="0" marL="0">
@@ -3827,7 +3863,9 @@
           <a:ln/>
         </p:spPr>
         <p:txBody>
-          <a:bodyPr wrap="square" lIns="2286" tIns="2286" rIns="2286" bIns="2286" rtlCol="0" anchor="ctr"/>
+          <a:bodyPr wrap="square" lIns="2286" tIns="2286" rIns="2286" bIns="2286" rtlCol="0" anchor="ctr">
+            <a:normAutofit/>
+          </a:bodyPr>
           <a:lstStyle/>
           <a:p>
             <a:pPr indent="0" marL="0">
@@ -3862,7 +3900,7 @@
                 <a:ea typeface="Microsoft JhengHei" pitchFamily="34" charset="-122"/>
                 <a:cs typeface="Microsoft JhengHei" pitchFamily="34" charset="-120"/>
               </a:rPr>
-              <a:t>自己的單據用自己的帳號開,權限異動找 Aaron</a:t>
+              <a:t>自己的單據用自己的帳號開,權限異動找 負責人</a:t>
             </a:r>
             <a:endParaRPr lang="en-US" sz="1600" dirty="0"/>
           </a:p>
@@ -3890,7 +3928,9 @@
           <a:ln/>
         </p:spPr>
         <p:txBody>
-          <a:bodyPr wrap="square" lIns="2286" tIns="2286" rIns="2286" bIns="2286" rtlCol="0" anchor="ctr"/>
+          <a:bodyPr wrap="square" lIns="2286" tIns="2286" rIns="2286" bIns="2286" rtlCol="0" anchor="ctr">
+            <a:normAutofit/>
+          </a:bodyPr>
           <a:lstStyle/>
           <a:p>
             <a:pPr indent="0" marL="0">
@@ -3940,11 +3980,11 @@
         <p:spPr>
           <a:xfrm>
             <a:off x="548640" y="4663440"/>
-            <a:ext cx="11091672" cy="502920"/>
+            <a:ext cx="11091672" cy="548640"/>
           </a:xfrm>
           <a:prstGeom prst="roundRect">
             <a:avLst>
-              <a:gd name="adj" fmla="val 10909"/>
+              <a:gd name="adj" fmla="val 10000"/>
             </a:avLst>
           </a:prstGeom>
           <a:solidFill>
@@ -3953,7 +3993,9 @@
           <a:ln/>
         </p:spPr>
         <p:txBody>
-          <a:bodyPr wrap="square" lIns="1524" tIns="1524" rIns="1524" bIns="1524" rtlCol="0" anchor="ctr"/>
+          <a:bodyPr wrap="square" lIns="1524" tIns="1524" rIns="1524" bIns="1524" rtlCol="0" anchor="ctr">
+            <a:normAutofit/>
+          </a:bodyPr>
           <a:lstStyle/>
           <a:p>
             <a:pPr algn="l" indent="0" marL="0">
@@ -3968,7 +4010,7 @@
                 <a:ea typeface="Microsoft JhengHei" pitchFamily="34" charset="-122"/>
                 <a:cs typeface="Microsoft JhengHei" pitchFamily="34" charset="-120"/>
               </a:rPr>
-              <a:t>每月結帳前(月底最後 2 個工作日)為「單據清倉日」:四人各自清空未完成單據,Maggie 確認後才進行月結對帳</a:t>
+              <a:t>每月結帳前(月底最後 2 個工作日)為「單據清倉日」:四人各自清空未完成單據,後勤行政 確認後才進行月結對帳</a:t>
             </a:r>
             <a:endParaRPr lang="en-US" sz="1200" dirty="0"/>
           </a:p>
@@ -4149,7 +4191,9 @@
           <a:ln/>
         </p:spPr>
         <p:txBody>
-          <a:bodyPr wrap="square" lIns="1905" tIns="1905" rIns="1905" bIns="1905" rtlCol="0" anchor="ctr"/>
+          <a:bodyPr wrap="square" lIns="1905" tIns="1905" rIns="1905" bIns="1905" rtlCol="0" anchor="ctr">
+            <a:normAutofit/>
+          </a:bodyPr>
           <a:lstStyle/>
           <a:p>
             <a:pPr indent="0" marL="0">
@@ -4235,7 +4279,9 @@
           <a:ln/>
         </p:spPr>
         <p:txBody>
-          <a:bodyPr wrap="square" lIns="1905" tIns="1905" rIns="1905" bIns="1905" rtlCol="0" anchor="ctr"/>
+          <a:bodyPr wrap="square" lIns="1905" tIns="1905" rIns="1905" bIns="1905" rtlCol="0" anchor="ctr">
+            <a:normAutofit/>
+          </a:bodyPr>
           <a:lstStyle/>
           <a:p>
             <a:pPr indent="0" marL="0">
@@ -4321,7 +4367,9 @@
           <a:ln/>
         </p:spPr>
         <p:txBody>
-          <a:bodyPr wrap="square" lIns="1905" tIns="1905" rIns="1905" bIns="1905" rtlCol="0" anchor="ctr"/>
+          <a:bodyPr wrap="square" lIns="1905" tIns="1905" rIns="1905" bIns="1905" rtlCol="0" anchor="ctr">
+            <a:normAutofit/>
+          </a:bodyPr>
           <a:lstStyle/>
           <a:p>
             <a:pPr indent="0" marL="0">
@@ -4407,7 +4455,9 @@
           <a:ln/>
         </p:spPr>
         <p:txBody>
-          <a:bodyPr wrap="square" lIns="1905" tIns="1905" rIns="1905" bIns="1905" rtlCol="0" anchor="ctr"/>
+          <a:bodyPr wrap="square" lIns="1905" tIns="1905" rIns="1905" bIns="1905" rtlCol="0" anchor="ctr">
+            <a:normAutofit/>
+          </a:bodyPr>
           <a:lstStyle/>
           <a:p>
             <a:pPr indent="0" marL="0">
@@ -4493,7 +4543,9 @@
           <a:ln/>
         </p:spPr>
         <p:txBody>
-          <a:bodyPr wrap="square" lIns="1905" tIns="1905" rIns="1905" bIns="1905" rtlCol="0" anchor="ctr"/>
+          <a:bodyPr wrap="square" lIns="1905" tIns="1905" rIns="1905" bIns="1905" rtlCol="0" anchor="ctr">
+            <a:normAutofit/>
+          </a:bodyPr>
           <a:lstStyle/>
           <a:p>
             <a:pPr indent="0" marL="0">
@@ -4660,7 +4712,7 @@
                 <a:ea typeface="Microsoft JhengHei" pitchFamily="34" charset="-122"/>
                 <a:cs typeface="Microsoft JhengHei" pitchFamily="34" charset="-120"/>
               </a:rPr>
-              <a:t>本簡報與「員工工作手冊」(Excel)配套使用,每季由 Frankie 檢視更新</a:t>
+              <a:t>本簡報與「員工工作手冊」(Excel)配套使用,每季由 營運管理 檢視更新</a:t>
             </a:r>
             <a:endParaRPr lang="en-US" sz="1400" dirty="0"/>
           </a:p>
@@ -4856,7 +4908,9 @@
           <a:ln/>
         </p:spPr>
         <p:txBody>
-          <a:bodyPr wrap="square" lIns="1905" tIns="1905" rIns="1905" bIns="1905" rtlCol="0" anchor="t"/>
+          <a:bodyPr wrap="square" lIns="1905" tIns="1905" rIns="1905" bIns="1905" rtlCol="0" anchor="t">
+            <a:normAutofit/>
+          </a:bodyPr>
           <a:lstStyle/>
           <a:p>
             <a:pPr algn="ctr" indent="0" marL="0">
@@ -4963,7 +5017,9 @@
           <a:ln/>
         </p:spPr>
         <p:txBody>
-          <a:bodyPr wrap="square" lIns="1905" tIns="1905" rIns="1905" bIns="1905" rtlCol="0" anchor="t"/>
+          <a:bodyPr wrap="square" lIns="1905" tIns="1905" rIns="1905" bIns="1905" rtlCol="0" anchor="t">
+            <a:normAutofit/>
+          </a:bodyPr>
           <a:lstStyle/>
           <a:p>
             <a:pPr algn="ctr" indent="0" marL="0">
@@ -5070,7 +5126,9 @@
           <a:ln/>
         </p:spPr>
         <p:txBody>
-          <a:bodyPr wrap="square" lIns="1905" tIns="1905" rIns="1905" bIns="1905" rtlCol="0" anchor="t"/>
+          <a:bodyPr wrap="square" lIns="1905" tIns="1905" rIns="1905" bIns="1905" rtlCol="0" anchor="t">
+            <a:normAutofit/>
+          </a:bodyPr>
           <a:lstStyle/>
           <a:p>
             <a:pPr algn="ctr" indent="0" marL="0">
@@ -5123,11 +5181,11 @@
         <p:spPr>
           <a:xfrm>
             <a:off x="548640" y="4892040"/>
-            <a:ext cx="11091672" cy="502920"/>
+            <a:ext cx="11091672" cy="548640"/>
           </a:xfrm>
           <a:prstGeom prst="roundRect">
             <a:avLst>
-              <a:gd name="adj" fmla="val 10909"/>
+              <a:gd name="adj" fmla="val 10000"/>
             </a:avLst>
           </a:prstGeom>
           <a:solidFill>
@@ -5136,7 +5194,9 @@
           <a:ln/>
         </p:spPr>
         <p:txBody>
-          <a:bodyPr wrap="square" lIns="1524" tIns="1524" rIns="1524" bIns="1524" rtlCol="0" anchor="ctr"/>
+          <a:bodyPr wrap="square" lIns="1524" tIns="1524" rIns="1524" bIns="1524" rtlCol="0" anchor="ctr">
+            <a:normAutofit/>
+          </a:bodyPr>
           <a:lstStyle/>
           <a:p>
             <a:pPr algn="l" indent="0" marL="0">
@@ -5328,7 +5388,9 @@
           <a:ln/>
         </p:spPr>
         <p:txBody>
-          <a:bodyPr wrap="square" lIns="762" tIns="762" rIns="762" bIns="762" rtlCol="0" anchor="ctr"/>
+          <a:bodyPr wrap="square" lIns="762" tIns="762" rIns="762" bIns="762" rtlCol="0" anchor="ctr">
+            <a:normAutofit/>
+          </a:bodyPr>
           <a:lstStyle/>
           <a:p>
             <a:pPr algn="ctr" indent="0" marL="0">
@@ -5380,8 +5442,8 @@
         </p:nvSpPr>
         <p:spPr>
           <a:xfrm>
-            <a:off x="1037844" y="2889504"/>
-            <a:ext cx="1005840" cy="274320"/>
+            <a:off x="809244" y="2889504"/>
+            <a:ext cx="1463040" cy="292608"/>
           </a:xfrm>
           <a:prstGeom prst="rect">
             <a:avLst/>
@@ -5390,14 +5452,16 @@
           <a:ln/>
         </p:spPr>
         <p:txBody>
-          <a:bodyPr wrap="square" lIns="0" tIns="0" rIns="0" bIns="0" rtlCol="0" anchor="ctr"/>
+          <a:bodyPr wrap="square" lIns="0" tIns="0" rIns="0" bIns="0" rtlCol="0" anchor="ctr">
+            <a:normAutofit/>
+          </a:bodyPr>
           <a:lstStyle/>
           <a:p>
             <a:pPr algn="ctr" indent="0" marL="0">
               <a:buNone/>
             </a:pPr>
             <a:r>
-              <a:rPr lang="en-US" sz="1000" b="1" dirty="0">
+              <a:rPr lang="en-US" sz="1050" b="1" dirty="0">
                 <a:solidFill>
                   <a:srgbClr val="2E7D55"/>
                 </a:solidFill>
@@ -5405,9 +5469,9 @@
                 <a:ea typeface="Microsoft JhengHei" pitchFamily="34" charset="-122"/>
                 <a:cs typeface="Microsoft JhengHei" pitchFamily="34" charset="-120"/>
               </a:rPr>
-              <a:t>小民</a:t>
-            </a:r>
-            <a:endParaRPr lang="en-US" sz="1000" dirty="0"/>
+              <a:t>電商營運</a:t>
+            </a:r>
+            <a:endParaRPr lang="en-US" sz="1050" dirty="0"/>
           </a:p>
         </p:txBody>
       </p:sp>
@@ -5453,7 +5517,9 @@
           <a:ln/>
         </p:spPr>
         <p:txBody>
-          <a:bodyPr wrap="square" lIns="762" tIns="762" rIns="762" bIns="762" rtlCol="0" anchor="ctr"/>
+          <a:bodyPr wrap="square" lIns="762" tIns="762" rIns="762" bIns="762" rtlCol="0" anchor="ctr">
+            <a:normAutofit/>
+          </a:bodyPr>
           <a:lstStyle/>
           <a:p>
             <a:pPr algn="ctr" indent="0" marL="0">
@@ -5505,8 +5571,8 @@
         </p:nvSpPr>
         <p:spPr>
           <a:xfrm>
-            <a:off x="3314700" y="2889504"/>
-            <a:ext cx="1005840" cy="274320"/>
+            <a:off x="3086100" y="2889504"/>
+            <a:ext cx="1463040" cy="292608"/>
           </a:xfrm>
           <a:prstGeom prst="rect">
             <a:avLst/>
@@ -5515,14 +5581,16 @@
           <a:ln/>
         </p:spPr>
         <p:txBody>
-          <a:bodyPr wrap="square" lIns="0" tIns="0" rIns="0" bIns="0" rtlCol="0" anchor="ctr"/>
+          <a:bodyPr wrap="square" lIns="0" tIns="0" rIns="0" bIns="0" rtlCol="0" anchor="ctr">
+            <a:normAutofit/>
+          </a:bodyPr>
           <a:lstStyle/>
           <a:p>
             <a:pPr algn="ctr" indent="0" marL="0">
               <a:buNone/>
             </a:pPr>
             <a:r>
-              <a:rPr lang="en-US" sz="1000" b="1" dirty="0">
+              <a:rPr lang="en-US" sz="1050" b="1" dirty="0">
                 <a:solidFill>
                   <a:srgbClr val="2E7D55"/>
                 </a:solidFill>
@@ -5530,9 +5598,9 @@
                 <a:ea typeface="Microsoft JhengHei" pitchFamily="34" charset="-122"/>
                 <a:cs typeface="Microsoft JhengHei" pitchFamily="34" charset="-120"/>
               </a:rPr>
-              <a:t>小民</a:t>
-            </a:r>
-            <a:endParaRPr lang="en-US" sz="1000" dirty="0"/>
+              <a:t>電商營運</a:t>
+            </a:r>
+            <a:endParaRPr lang="en-US" sz="1050" dirty="0"/>
           </a:p>
         </p:txBody>
       </p:sp>
@@ -5578,7 +5646,9 @@
           <a:ln/>
         </p:spPr>
         <p:txBody>
-          <a:bodyPr wrap="square" lIns="762" tIns="762" rIns="762" bIns="762" rtlCol="0" anchor="ctr"/>
+          <a:bodyPr wrap="square" lIns="762" tIns="762" rIns="762" bIns="762" rtlCol="0" anchor="ctr">
+            <a:normAutofit/>
+          </a:bodyPr>
           <a:lstStyle/>
           <a:p>
             <a:pPr algn="ctr" indent="0" marL="0">
@@ -5630,8 +5700,8 @@
         </p:nvSpPr>
         <p:spPr>
           <a:xfrm>
-            <a:off x="5591556" y="2889504"/>
-            <a:ext cx="1005840" cy="274320"/>
+            <a:off x="5362956" y="2889504"/>
+            <a:ext cx="1463040" cy="292608"/>
           </a:xfrm>
           <a:prstGeom prst="rect">
             <a:avLst/>
@@ -5640,14 +5710,16 @@
           <a:ln/>
         </p:spPr>
         <p:txBody>
-          <a:bodyPr wrap="square" lIns="0" tIns="0" rIns="0" bIns="0" rtlCol="0" anchor="ctr"/>
+          <a:bodyPr wrap="square" lIns="0" tIns="0" rIns="0" bIns="0" rtlCol="0" anchor="ctr">
+            <a:normAutofit/>
+          </a:bodyPr>
           <a:lstStyle/>
           <a:p>
             <a:pPr algn="ctr" indent="0" marL="0">
               <a:buNone/>
             </a:pPr>
             <a:r>
-              <a:rPr lang="en-US" sz="1000" b="1" dirty="0">
+              <a:rPr lang="en-US" sz="1050" b="1" dirty="0">
                 <a:solidFill>
                   <a:srgbClr val="B3402F"/>
                 </a:solidFill>
@@ -5655,9 +5727,9 @@
                 <a:ea typeface="Microsoft JhengHei" pitchFamily="34" charset="-122"/>
                 <a:cs typeface="Microsoft JhengHei" pitchFamily="34" charset="-120"/>
               </a:rPr>
-              <a:t>Abby</a:t>
-            </a:r>
-            <a:endParaRPr lang="en-US" sz="1000" dirty="0"/>
+              <a:t>倉儲</a:t>
+            </a:r>
+            <a:endParaRPr lang="en-US" sz="1050" dirty="0"/>
           </a:p>
         </p:txBody>
       </p:sp>
@@ -5703,7 +5775,9 @@
           <a:ln/>
         </p:spPr>
         <p:txBody>
-          <a:bodyPr wrap="square" lIns="762" tIns="762" rIns="762" bIns="762" rtlCol="0" anchor="ctr"/>
+          <a:bodyPr wrap="square" lIns="762" tIns="762" rIns="762" bIns="762" rtlCol="0" anchor="ctr">
+            <a:normAutofit/>
+          </a:bodyPr>
           <a:lstStyle/>
           <a:p>
             <a:pPr algn="ctr" indent="0" marL="0">
@@ -5755,8 +5829,8 @@
         </p:nvSpPr>
         <p:spPr>
           <a:xfrm>
-            <a:off x="7868412" y="2889504"/>
-            <a:ext cx="1005840" cy="274320"/>
+            <a:off x="7639812" y="2889504"/>
+            <a:ext cx="1463040" cy="292608"/>
           </a:xfrm>
           <a:prstGeom prst="rect">
             <a:avLst/>
@@ -5765,14 +5839,16 @@
           <a:ln/>
         </p:spPr>
         <p:txBody>
-          <a:bodyPr wrap="square" lIns="0" tIns="0" rIns="0" bIns="0" rtlCol="0" anchor="ctr"/>
+          <a:bodyPr wrap="square" lIns="0" tIns="0" rIns="0" bIns="0" rtlCol="0" anchor="ctr">
+            <a:normAutofit/>
+          </a:bodyPr>
           <a:lstStyle/>
           <a:p>
             <a:pPr algn="ctr" indent="0" marL="0">
               <a:buNone/>
             </a:pPr>
             <a:r>
-              <a:rPr lang="en-US" sz="1000" b="1" dirty="0">
+              <a:rPr lang="en-US" sz="1050" b="1" dirty="0">
                 <a:solidFill>
                   <a:srgbClr val="B3402F"/>
                 </a:solidFill>
@@ -5780,9 +5856,9 @@
                 <a:ea typeface="Microsoft JhengHei" pitchFamily="34" charset="-122"/>
                 <a:cs typeface="Microsoft JhengHei" pitchFamily="34" charset="-120"/>
               </a:rPr>
-              <a:t>Abby</a:t>
-            </a:r>
-            <a:endParaRPr lang="en-US" sz="1000" dirty="0"/>
+              <a:t>倉儲</a:t>
+            </a:r>
+            <a:endParaRPr lang="en-US" sz="1050" dirty="0"/>
           </a:p>
         </p:txBody>
       </p:sp>
@@ -5828,7 +5904,9 @@
           <a:ln/>
         </p:spPr>
         <p:txBody>
-          <a:bodyPr wrap="square" lIns="762" tIns="762" rIns="762" bIns="762" rtlCol="0" anchor="ctr"/>
+          <a:bodyPr wrap="square" lIns="762" tIns="762" rIns="762" bIns="762" rtlCol="0" anchor="ctr">
+            <a:normAutofit/>
+          </a:bodyPr>
           <a:lstStyle/>
           <a:p>
             <a:pPr algn="ctr" indent="0" marL="0">
@@ -5880,8 +5958,8 @@
         </p:nvSpPr>
         <p:spPr>
           <a:xfrm>
-            <a:off x="10145268" y="2889504"/>
-            <a:ext cx="1005840" cy="274320"/>
+            <a:off x="9916668" y="2889504"/>
+            <a:ext cx="1463040" cy="292608"/>
           </a:xfrm>
           <a:prstGeom prst="rect">
             <a:avLst/>
@@ -5890,14 +5968,16 @@
           <a:ln/>
         </p:spPr>
         <p:txBody>
-          <a:bodyPr wrap="square" lIns="0" tIns="0" rIns="0" bIns="0" rtlCol="0" anchor="ctr"/>
+          <a:bodyPr wrap="square" lIns="0" tIns="0" rIns="0" bIns="0" rtlCol="0" anchor="ctr">
+            <a:normAutofit/>
+          </a:bodyPr>
           <a:lstStyle/>
           <a:p>
             <a:pPr algn="ctr" indent="0" marL="0">
               <a:buNone/>
             </a:pPr>
             <a:r>
-              <a:rPr lang="en-US" sz="1000" b="1" dirty="0">
+              <a:rPr lang="en-US" sz="1050" b="1" dirty="0">
                 <a:solidFill>
                   <a:srgbClr val="1C5D99"/>
                 </a:solidFill>
@@ -5905,9 +5985,9 @@
                 <a:ea typeface="Microsoft JhengHei" pitchFamily="34" charset="-122"/>
                 <a:cs typeface="Microsoft JhengHei" pitchFamily="34" charset="-120"/>
               </a:rPr>
-              <a:t>Maggie</a:t>
-            </a:r>
-            <a:endParaRPr lang="en-US" sz="1000" dirty="0"/>
+              <a:t>後勤行政</a:t>
+            </a:r>
+            <a:endParaRPr lang="en-US" sz="1050" dirty="0"/>
           </a:p>
         </p:txBody>
       </p:sp>
@@ -5972,7 +6052,9 @@
           <a:ln/>
         </p:spPr>
         <p:txBody>
-          <a:bodyPr wrap="square" lIns="762" tIns="762" rIns="762" bIns="762" rtlCol="0" anchor="ctr"/>
+          <a:bodyPr wrap="square" lIns="762" tIns="762" rIns="762" bIns="762" rtlCol="0" anchor="ctr">
+            <a:normAutofit/>
+          </a:bodyPr>
           <a:lstStyle/>
           <a:p>
             <a:pPr algn="ctr" indent="0" marL="0">
@@ -6024,8 +6106,8 @@
         </p:nvSpPr>
         <p:spPr>
           <a:xfrm>
-            <a:off x="1037844" y="4992624"/>
-            <a:ext cx="1005840" cy="274320"/>
+            <a:off x="809244" y="4992624"/>
+            <a:ext cx="1463040" cy="292608"/>
           </a:xfrm>
           <a:prstGeom prst="rect">
             <a:avLst/>
@@ -6034,14 +6116,16 @@
           <a:ln/>
         </p:spPr>
         <p:txBody>
-          <a:bodyPr wrap="square" lIns="0" tIns="0" rIns="0" bIns="0" rtlCol="0" anchor="ctr"/>
+          <a:bodyPr wrap="square" lIns="0" tIns="0" rIns="0" bIns="0" rtlCol="0" anchor="ctr">
+            <a:normAutofit/>
+          </a:bodyPr>
           <a:lstStyle/>
           <a:p>
             <a:pPr algn="ctr" indent="0" marL="0">
               <a:buNone/>
             </a:pPr>
             <a:r>
-              <a:rPr lang="en-US" sz="1000" b="1" dirty="0">
+              <a:rPr lang="en-US" sz="1050" b="1" dirty="0">
                 <a:solidFill>
                   <a:srgbClr val="5B6B7C"/>
                 </a:solidFill>
@@ -6049,9 +6133,9 @@
                 <a:ea typeface="Microsoft JhengHei" pitchFamily="34" charset="-122"/>
                 <a:cs typeface="Microsoft JhengHei" pitchFamily="34" charset="-120"/>
               </a:rPr>
-              <a:t>Aaron</a:t>
-            </a:r>
-            <a:endParaRPr lang="en-US" sz="1000" dirty="0"/>
+              <a:t>負責人</a:t>
+            </a:r>
+            <a:endParaRPr lang="en-US" sz="1050" dirty="0"/>
           </a:p>
         </p:txBody>
       </p:sp>
@@ -6097,7 +6181,9 @@
           <a:ln/>
         </p:spPr>
         <p:txBody>
-          <a:bodyPr wrap="square" lIns="762" tIns="762" rIns="762" bIns="762" rtlCol="0" anchor="ctr"/>
+          <a:bodyPr wrap="square" lIns="762" tIns="762" rIns="762" bIns="762" rtlCol="0" anchor="ctr">
+            <a:normAutofit/>
+          </a:bodyPr>
           <a:lstStyle/>
           <a:p>
             <a:pPr algn="ctr" indent="0" marL="0">
@@ -6149,8 +6235,8 @@
         </p:nvSpPr>
         <p:spPr>
           <a:xfrm>
-            <a:off x="3314700" y="4992624"/>
-            <a:ext cx="1005840" cy="274320"/>
+            <a:off x="3086100" y="4992624"/>
+            <a:ext cx="1463040" cy="292608"/>
           </a:xfrm>
           <a:prstGeom prst="rect">
             <a:avLst/>
@@ -6159,14 +6245,16 @@
           <a:ln/>
         </p:spPr>
         <p:txBody>
-          <a:bodyPr wrap="square" lIns="0" tIns="0" rIns="0" bIns="0" rtlCol="0" anchor="ctr"/>
+          <a:bodyPr wrap="square" lIns="0" tIns="0" rIns="0" bIns="0" rtlCol="0" anchor="ctr">
+            <a:normAutofit/>
+          </a:bodyPr>
           <a:lstStyle/>
           <a:p>
             <a:pPr algn="ctr" indent="0" marL="0">
               <a:buNone/>
             </a:pPr>
             <a:r>
-              <a:rPr lang="en-US" sz="1000" b="1" dirty="0">
+              <a:rPr lang="en-US" sz="1050" b="1" dirty="0">
                 <a:solidFill>
                   <a:srgbClr val="1C5D99"/>
                 </a:solidFill>
@@ -6174,9 +6262,9 @@
                 <a:ea typeface="Microsoft JhengHei" pitchFamily="34" charset="-122"/>
                 <a:cs typeface="Microsoft JhengHei" pitchFamily="34" charset="-120"/>
               </a:rPr>
-              <a:t>Maggie</a:t>
-            </a:r>
-            <a:endParaRPr lang="en-US" sz="1000" dirty="0"/>
+              <a:t>後勤行政</a:t>
+            </a:r>
+            <a:endParaRPr lang="en-US" sz="1050" dirty="0"/>
           </a:p>
         </p:txBody>
       </p:sp>
@@ -6222,7 +6310,9 @@
           <a:ln/>
         </p:spPr>
         <p:txBody>
-          <a:bodyPr wrap="square" lIns="762" tIns="762" rIns="762" bIns="762" rtlCol="0" anchor="ctr"/>
+          <a:bodyPr wrap="square" lIns="762" tIns="762" rIns="762" bIns="762" rtlCol="0" anchor="ctr">
+            <a:normAutofit/>
+          </a:bodyPr>
           <a:lstStyle/>
           <a:p>
             <a:pPr algn="ctr" indent="0" marL="0">
@@ -6274,8 +6364,8 @@
         </p:nvSpPr>
         <p:spPr>
           <a:xfrm>
-            <a:off x="5591556" y="4992624"/>
-            <a:ext cx="1005840" cy="274320"/>
+            <a:off x="5362956" y="4992624"/>
+            <a:ext cx="1463040" cy="292608"/>
           </a:xfrm>
           <a:prstGeom prst="rect">
             <a:avLst/>
@@ -6284,14 +6374,16 @@
           <a:ln/>
         </p:spPr>
         <p:txBody>
-          <a:bodyPr wrap="square" lIns="0" tIns="0" rIns="0" bIns="0" rtlCol="0" anchor="ctr"/>
+          <a:bodyPr wrap="square" lIns="0" tIns="0" rIns="0" bIns="0" rtlCol="0" anchor="ctr">
+            <a:normAutofit/>
+          </a:bodyPr>
           <a:lstStyle/>
           <a:p>
             <a:pPr algn="ctr" indent="0" marL="0">
               <a:buNone/>
             </a:pPr>
             <a:r>
-              <a:rPr lang="en-US" sz="1000" b="1" dirty="0">
+              <a:rPr lang="en-US" sz="1050" b="1" dirty="0">
                 <a:solidFill>
                   <a:srgbClr val="B3402F"/>
                 </a:solidFill>
@@ -6299,9 +6391,9 @@
                 <a:ea typeface="Microsoft JhengHei" pitchFamily="34" charset="-122"/>
                 <a:cs typeface="Microsoft JhengHei" pitchFamily="34" charset="-120"/>
               </a:rPr>
-              <a:t>Abby</a:t>
-            </a:r>
-            <a:endParaRPr lang="en-US" sz="1000" dirty="0"/>
+              <a:t>倉儲</a:t>
+            </a:r>
+            <a:endParaRPr lang="en-US" sz="1050" dirty="0"/>
           </a:p>
         </p:txBody>
       </p:sp>
@@ -6347,7 +6439,9 @@
           <a:ln/>
         </p:spPr>
         <p:txBody>
-          <a:bodyPr wrap="square" lIns="762" tIns="762" rIns="762" bIns="762" rtlCol="0" anchor="ctr"/>
+          <a:bodyPr wrap="square" lIns="762" tIns="762" rIns="762" bIns="762" rtlCol="0" anchor="ctr">
+            <a:normAutofit/>
+          </a:bodyPr>
           <a:lstStyle/>
           <a:p>
             <a:pPr algn="ctr" indent="0" marL="0">
@@ -6399,8 +6493,8 @@
         </p:nvSpPr>
         <p:spPr>
           <a:xfrm>
-            <a:off x="7868412" y="4992624"/>
-            <a:ext cx="1005840" cy="274320"/>
+            <a:off x="7639812" y="4992624"/>
+            <a:ext cx="1463040" cy="292608"/>
           </a:xfrm>
           <a:prstGeom prst="rect">
             <a:avLst/>
@@ -6409,14 +6503,16 @@
           <a:ln/>
         </p:spPr>
         <p:txBody>
-          <a:bodyPr wrap="square" lIns="0" tIns="0" rIns="0" bIns="0" rtlCol="0" anchor="ctr"/>
+          <a:bodyPr wrap="square" lIns="0" tIns="0" rIns="0" bIns="0" rtlCol="0" anchor="ctr">
+            <a:normAutofit/>
+          </a:bodyPr>
           <a:lstStyle/>
           <a:p>
             <a:pPr algn="ctr" indent="0" marL="0">
               <a:buNone/>
             </a:pPr>
             <a:r>
-              <a:rPr lang="en-US" sz="1000" b="1" dirty="0">
+              <a:rPr lang="en-US" sz="1050" b="1" dirty="0">
                 <a:solidFill>
                   <a:srgbClr val="B3402F"/>
                 </a:solidFill>
@@ -6424,9 +6520,9 @@
                 <a:ea typeface="Microsoft JhengHei" pitchFamily="34" charset="-122"/>
                 <a:cs typeface="Microsoft JhengHei" pitchFamily="34" charset="-120"/>
               </a:rPr>
-              <a:t>Abby</a:t>
-            </a:r>
-            <a:endParaRPr lang="en-US" sz="1000" dirty="0"/>
+              <a:t>倉儲</a:t>
+            </a:r>
+            <a:endParaRPr lang="en-US" sz="1050" dirty="0"/>
           </a:p>
         </p:txBody>
       </p:sp>
@@ -6472,7 +6568,9 @@
           <a:ln/>
         </p:spPr>
         <p:txBody>
-          <a:bodyPr wrap="square" lIns="762" tIns="762" rIns="762" bIns="762" rtlCol="0" anchor="ctr"/>
+          <a:bodyPr wrap="square" lIns="762" tIns="762" rIns="762" bIns="762" rtlCol="0" anchor="ctr">
+            <a:normAutofit/>
+          </a:bodyPr>
           <a:lstStyle/>
           <a:p>
             <a:pPr algn="ctr" indent="0" marL="0">
@@ -6510,7 +6608,7 @@
                 <a:ea typeface="Microsoft JhengHei" pitchFamily="34" charset="-122"/>
                 <a:cs typeface="Microsoft JhengHei" pitchFamily="34" charset="-120"/>
               </a:rPr>
-              <a:t>付款清單→Aaron</a:t>
+              <a:t>付款清單→負責人</a:t>
             </a:r>
             <a:endParaRPr lang="en-US" sz="1300" dirty="0"/>
           </a:p>
@@ -6524,8 +6622,8 @@
         </p:nvSpPr>
         <p:spPr>
           <a:xfrm>
-            <a:off x="10145268" y="4992624"/>
-            <a:ext cx="1005840" cy="274320"/>
+            <a:off x="9916668" y="4992624"/>
+            <a:ext cx="1463040" cy="292608"/>
           </a:xfrm>
           <a:prstGeom prst="rect">
             <a:avLst/>
@@ -6534,14 +6632,16 @@
           <a:ln/>
         </p:spPr>
         <p:txBody>
-          <a:bodyPr wrap="square" lIns="0" tIns="0" rIns="0" bIns="0" rtlCol="0" anchor="ctr"/>
+          <a:bodyPr wrap="square" lIns="0" tIns="0" rIns="0" bIns="0" rtlCol="0" anchor="ctr">
+            <a:normAutofit/>
+          </a:bodyPr>
           <a:lstStyle/>
           <a:p>
             <a:pPr algn="ctr" indent="0" marL="0">
               <a:buNone/>
             </a:pPr>
             <a:r>
-              <a:rPr lang="en-US" sz="1000" b="1" dirty="0">
+              <a:rPr lang="en-US" sz="1050" b="1" dirty="0">
                 <a:solidFill>
                   <a:srgbClr val="1C5D99"/>
                 </a:solidFill>
@@ -6549,9 +6649,9 @@
                 <a:ea typeface="Microsoft JhengHei" pitchFamily="34" charset="-122"/>
                 <a:cs typeface="Microsoft JhengHei" pitchFamily="34" charset="-120"/>
               </a:rPr>
-              <a:t>Maggie</a:t>
-            </a:r>
-            <a:endParaRPr lang="en-US" sz="1000" dirty="0"/>
+              <a:t>後勤行政</a:t>
+            </a:r>
+            <a:endParaRPr lang="en-US" sz="1050" dirty="0"/>
           </a:p>
         </p:txBody>
       </p:sp>
@@ -6564,11 +6664,11 @@
         <p:spPr>
           <a:xfrm>
             <a:off x="548640" y="5623560"/>
-            <a:ext cx="11091672" cy="502920"/>
+            <a:ext cx="11091672" cy="548640"/>
           </a:xfrm>
           <a:prstGeom prst="roundRect">
             <a:avLst>
-              <a:gd name="adj" fmla="val 10909"/>
+              <a:gd name="adj" fmla="val 10000"/>
             </a:avLst>
           </a:prstGeom>
           <a:solidFill>
@@ -6577,7 +6677,9 @@
           <a:ln/>
         </p:spPr>
         <p:txBody>
-          <a:bodyPr wrap="square" lIns="1524" tIns="1524" rIns="1524" bIns="1524" rtlCol="0" anchor="ctr"/>
+          <a:bodyPr wrap="square" lIns="1524" tIns="1524" rIns="1524" bIns="1524" rtlCol="0" anchor="ctr">
+            <a:normAutofit/>
+          </a:bodyPr>
           <a:lstStyle/>
           <a:p>
             <a:pPr algn="l" indent="0" marL="0">
@@ -6592,7 +6694,7 @@
                 <a:ea typeface="Microsoft JhengHei" pitchFamily="34" charset="-122"/>
                 <a:cs typeface="Microsoft JhengHei" pitchFamily="34" charset="-120"/>
               </a:rPr>
-              <a:t>基本資料(商品/客戶/供應商)由 Una 依建檔規則維護,是兩條線共用的地基——編號亂了,全部的單據都亂</a:t>
+              <a:t>基本資料(商品/客戶/供應商)由 行政協助 依建檔規則維護,是兩條線共用的地基——編號亂了,全部的單據都亂</a:t>
             </a:r>
             <a:endParaRPr lang="en-US" sz="1200" dirty="0"/>
           </a:p>
@@ -6824,7 +6926,7 @@
                           <a:ea typeface="Microsoft JhengHei" pitchFamily="34" charset="-122"/>
                           <a:cs typeface="Microsoft JhengHei" pitchFamily="34" charset="-120"/>
                         </a:rPr>
-                        <a:t>Maggie</a:t>
+                        <a:t>後勤行政</a:t>
                       </a:r>
                       <a:endParaRPr lang="en-US" sz="1150" dirty="0">
                         <a:latin typeface="Microsoft JhengHei" charset="0"/>
@@ -6892,7 +6994,7 @@
                           <a:ea typeface="Microsoft JhengHei" pitchFamily="34" charset="-122"/>
                           <a:cs typeface="Microsoft JhengHei" pitchFamily="34" charset="-120"/>
                         </a:rPr>
-                        <a:t>小民</a:t>
+                        <a:t>電商營運</a:t>
                       </a:r>
                       <a:endParaRPr lang="en-US" sz="1150" dirty="0">
                         <a:latin typeface="Microsoft JhengHei" charset="0"/>
@@ -6960,7 +7062,7 @@
                           <a:ea typeface="Microsoft JhengHei" pitchFamily="34" charset="-122"/>
                           <a:cs typeface="Microsoft JhengHei" pitchFamily="34" charset="-120"/>
                         </a:rPr>
-                        <a:t>Una</a:t>
+                        <a:t>行政協助</a:t>
                       </a:r>
                       <a:endParaRPr lang="en-US" sz="1150" dirty="0">
                         <a:latin typeface="Microsoft JhengHei" charset="0"/>
@@ -7028,7 +7130,7 @@
                           <a:ea typeface="Microsoft JhengHei" pitchFamily="34" charset="-122"/>
                           <a:cs typeface="Microsoft JhengHei" pitchFamily="34" charset="-120"/>
                         </a:rPr>
-                        <a:t>Abby</a:t>
+                        <a:t>倉儲</a:t>
                       </a:r>
                       <a:endParaRPr lang="en-US" sz="1150" dirty="0">
                         <a:latin typeface="Microsoft JhengHei" charset="0"/>
@@ -7096,7 +7198,7 @@
                           <a:ea typeface="Microsoft JhengHei" pitchFamily="34" charset="-122"/>
                           <a:cs typeface="Microsoft JhengHei" pitchFamily="34" charset="-120"/>
                         </a:rPr>
-                        <a:t>Frankie</a:t>
+                        <a:t>營運管理</a:t>
                       </a:r>
                       <a:endParaRPr lang="en-US" sz="1150" dirty="0">
                         <a:latin typeface="Microsoft JhengHei" charset="0"/>
@@ -10055,7 +10157,7 @@
                 <a:ea typeface="Microsoft JhengHei" pitchFamily="34" charset="-122"/>
                 <a:cs typeface="Microsoft JhengHei" pitchFamily="34" charset="-120"/>
               </a:rPr>
-              <a:t>Frankie 的應收/應付「○」為 Maggie 請假 3 日以上之對帳代理權限</a:t>
+              <a:t>營運管理 的應收/應付「○」為 後勤行政 請假 3 日以上之對帳代理權限</a:t>
             </a:r>
             <a:endParaRPr lang="en-US" sz="1050" dirty="0"/>
           </a:p>
@@ -10083,7 +10185,9 @@
           <a:ln/>
         </p:spPr>
         <p:txBody>
-          <a:bodyPr wrap="square" lIns="2286" tIns="2286" rIns="2286" bIns="2286" rtlCol="0" anchor="t"/>
+          <a:bodyPr wrap="square" lIns="2286" tIns="2286" rIns="2286" bIns="2286" rtlCol="0" anchor="t">
+            <a:normAutofit/>
+          </a:bodyPr>
           <a:lstStyle/>
           <a:p>
             <a:pPr indent="0" marL="0">
@@ -10143,7 +10247,7 @@
                 <a:ea typeface="Microsoft JhengHei" pitchFamily="34" charset="-122"/>
                 <a:cs typeface="Microsoft JhengHei" pitchFamily="34" charset="-120"/>
               </a:rPr>
-              <a:t>權限調整由 Aaron 核准後設定</a:t>
+              <a:t>權限調整由 負責人 核准後設定</a:t>
             </a:r>
             <a:endParaRPr lang="en-US" sz="1500" dirty="0"/>
           </a:p>
@@ -10232,7 +10336,7 @@
                 <a:ea typeface="Microsoft JhengHei" pitchFamily="34" charset="-122"/>
                 <a:cs typeface="Microsoft JhengHei" pitchFamily="34" charset="-120"/>
               </a:rPr>
-              <a:t>Maggie|採購執行流程</a:t>
+              <a:t>後勤行政|採購執行流程</a:t>
             </a:r>
             <a:endParaRPr lang="en-US" sz="2800" dirty="0"/>
           </a:p>
@@ -10271,7 +10375,7 @@
                 <a:ea typeface="Microsoft JhengHei" pitchFamily="34" charset="-122"/>
                 <a:cs typeface="Microsoft JhengHei" pitchFamily="34" charset="-120"/>
               </a:rPr>
-              <a:t>模組:採購管理|頻率:每日|代理:Una(輸入)、決策一律回到 Aaron</a:t>
+              <a:t>模組:採購管理|頻率:每日|代理:行政協助(輸入)、決策一律回到 負責人</a:t>
             </a:r>
             <a:endParaRPr lang="en-US" sz="1200" dirty="0"/>
           </a:p>
@@ -10299,7 +10403,9 @@
           <a:ln/>
         </p:spPr>
         <p:txBody>
-          <a:bodyPr wrap="square" lIns="762" tIns="762" rIns="762" bIns="762" rtlCol="0" anchor="ctr"/>
+          <a:bodyPr wrap="square" lIns="762" tIns="762" rIns="762" bIns="762" rtlCol="0" anchor="ctr">
+            <a:normAutofit/>
+          </a:bodyPr>
           <a:lstStyle/>
           <a:p>
             <a:pPr algn="ctr" indent="0" marL="0">
@@ -10385,7 +10491,9 @@
           <a:ln/>
         </p:spPr>
         <p:txBody>
-          <a:bodyPr wrap="square" lIns="762" tIns="762" rIns="762" bIns="762" rtlCol="0" anchor="ctr"/>
+          <a:bodyPr wrap="square" lIns="762" tIns="762" rIns="762" bIns="762" rtlCol="0" anchor="ctr">
+            <a:normAutofit/>
+          </a:bodyPr>
           <a:lstStyle/>
           <a:p>
             <a:pPr algn="ctr" indent="0" marL="0">
@@ -10471,7 +10579,9 @@
           <a:ln/>
         </p:spPr>
         <p:txBody>
-          <a:bodyPr wrap="square" lIns="762" tIns="762" rIns="762" bIns="762" rtlCol="0" anchor="ctr"/>
+          <a:bodyPr wrap="square" lIns="762" tIns="762" rIns="762" bIns="762" rtlCol="0" anchor="ctr">
+            <a:normAutofit/>
+          </a:bodyPr>
           <a:lstStyle/>
           <a:p>
             <a:pPr algn="ctr" indent="0" marL="0">
@@ -10557,7 +10667,9 @@
           <a:ln/>
         </p:spPr>
         <p:txBody>
-          <a:bodyPr wrap="square" lIns="762" tIns="762" rIns="762" bIns="762" rtlCol="0" anchor="ctr"/>
+          <a:bodyPr wrap="square" lIns="762" tIns="762" rIns="762" bIns="762" rtlCol="0" anchor="ctr">
+            <a:normAutofit/>
+          </a:bodyPr>
           <a:lstStyle/>
           <a:p>
             <a:pPr algn="ctr" indent="0" marL="0">
@@ -10595,7 +10707,7 @@
                 <a:ea typeface="Microsoft JhengHei" pitchFamily="34" charset="-122"/>
                 <a:cs typeface="Microsoft JhengHei" pitchFamily="34" charset="-120"/>
               </a:rPr>
-              <a:t>每日檢視未結採購單;延遲回報 Aaron</a:t>
+              <a:t>每日檢視未結採購單;延遲回報 負責人</a:t>
             </a:r>
             <a:endParaRPr lang="en-US" sz="1300" dirty="0"/>
           </a:p>
@@ -10643,7 +10755,9 @@
           <a:ln/>
         </p:spPr>
         <p:txBody>
-          <a:bodyPr wrap="square" lIns="762" tIns="762" rIns="762" bIns="762" rtlCol="0" anchor="ctr"/>
+          <a:bodyPr wrap="square" lIns="762" tIns="762" rIns="762" bIns="762" rtlCol="0" anchor="ctr">
+            <a:normAutofit/>
+          </a:bodyPr>
           <a:lstStyle/>
           <a:p>
             <a:pPr algn="ctr" indent="0" marL="0">
@@ -10681,7 +10795,7 @@
                 <a:ea typeface="Microsoft JhengHei" pitchFamily="34" charset="-122"/>
                 <a:cs typeface="Microsoft JhengHei" pitchFamily="34" charset="-120"/>
               </a:rPr>
-              <a:t>通知 Abby 預定到貨日與品項</a:t>
+              <a:t>通知 倉儲 預定到貨日與品項</a:t>
             </a:r>
             <a:endParaRPr lang="en-US" sz="1300" dirty="0"/>
           </a:p>
@@ -10709,7 +10823,9 @@
           <a:ln/>
         </p:spPr>
         <p:txBody>
-          <a:bodyPr wrap="square" lIns="2286" tIns="2286" rIns="2286" bIns="2286" rtlCol="0" anchor="t"/>
+          <a:bodyPr wrap="square" lIns="2286" tIns="2286" rIns="2286" bIns="2286" rtlCol="0" anchor="t">
+            <a:normAutofit/>
+          </a:bodyPr>
           <a:lstStyle/>
           <a:p>
             <a:pPr indent="0" marL="0">
@@ -10769,7 +10885,7 @@
                 <a:ea typeface="Microsoft JhengHei" pitchFamily="34" charset="-122"/>
                 <a:cs typeface="Microsoft JhengHei" pitchFamily="34" charset="-120"/>
               </a:rPr>
-              <a:t>單價與決策會不符時,先問 Aaron 再開單,不自行修改</a:t>
+              <a:t>單價與決策會不符時,先問 負責人 再開單,不自行修改</a:t>
             </a:r>
             <a:endParaRPr lang="en-US" sz="1400" dirty="0"/>
           </a:p>
@@ -10787,7 +10903,7 @@
                 <a:ea typeface="Microsoft JhengHei" pitchFamily="34" charset="-122"/>
                 <a:cs typeface="Microsoft JhengHei" pitchFamily="34" charset="-120"/>
               </a:rPr>
-              <a:t>Abby 點收差異回報後:短交→催補或開立折讓;溢交→退回或補單,當日處理。折讓/退回明細每週併付款清單交 Aaron 簽核</a:t>
+              <a:t>倉儲 點收差異回報後:短交→催補或開立折讓;溢交→退回或補單,當日處理。折讓/退回明細每週併付款清單交 負責人 簽核</a:t>
             </a:r>
             <a:endParaRPr lang="en-US" sz="1400" dirty="0"/>
           </a:p>
@@ -10802,11 +10918,11 @@
         <p:spPr>
           <a:xfrm>
             <a:off x="548640" y="5349240"/>
-            <a:ext cx="11091672" cy="502920"/>
+            <a:ext cx="11091672" cy="548640"/>
           </a:xfrm>
           <a:prstGeom prst="roundRect">
             <a:avLst>
-              <a:gd name="adj" fmla="val 10909"/>
+              <a:gd name="adj" fmla="val 10000"/>
             </a:avLst>
           </a:prstGeom>
           <a:solidFill>
@@ -10815,7 +10931,9 @@
           <a:ln/>
         </p:spPr>
         <p:txBody>
-          <a:bodyPr wrap="square" lIns="1524" tIns="1524" rIns="1524" bIns="1524" rtlCol="0" anchor="ctr"/>
+          <a:bodyPr wrap="square" lIns="1524" tIns="1524" rIns="1524" bIns="1524" rtlCol="0" anchor="ctr">
+            <a:normAutofit/>
+          </a:bodyPr>
           <a:lstStyle/>
           <a:p>
             <a:pPr algn="l" indent="0" marL="0">
@@ -10901,7 +11019,7 @@
                 <a:ea typeface="Microsoft JhengHei" pitchFamily="34" charset="-122"/>
                 <a:cs typeface="Microsoft JhengHei" pitchFamily="34" charset="-120"/>
               </a:rPr>
-              <a:t>Maggie|應收應付對帳流程</a:t>
+              <a:t>後勤行政|應收應付對帳流程</a:t>
             </a:r>
             <a:endParaRPr lang="en-US" sz="2800" dirty="0"/>
           </a:p>
@@ -10940,7 +11058,7 @@
                 <a:ea typeface="Microsoft JhengHei" pitchFamily="34" charset="-122"/>
                 <a:cs typeface="Microsoft JhengHei" pitchFamily="34" charset="-120"/>
               </a:rPr>
-              <a:t>模組:應收帳款/應付帳款|頻率:每週|代理:短假累積待回任,3 日以上由 Frankie 依手冊執行</a:t>
+              <a:t>模組:應收帳款/應付帳款|頻率:每週|代理:短假累積待回任,3 日以上由 營運管理 依手冊執行</a:t>
             </a:r>
             <a:endParaRPr lang="en-US" sz="1200" dirty="0"/>
           </a:p>
@@ -11007,7 +11125,9 @@
           <a:ln/>
         </p:spPr>
         <p:txBody>
-          <a:bodyPr wrap="square" lIns="762" tIns="762" rIns="762" bIns="762" rtlCol="0" anchor="ctr"/>
+          <a:bodyPr wrap="square" lIns="762" tIns="762" rIns="762" bIns="762" rtlCol="0" anchor="ctr">
+            <a:normAutofit/>
+          </a:bodyPr>
           <a:lstStyle/>
           <a:p>
             <a:pPr algn="ctr" indent="0" marL="0">
@@ -11093,7 +11213,9 @@
           <a:ln/>
         </p:spPr>
         <p:txBody>
-          <a:bodyPr wrap="square" lIns="762" tIns="762" rIns="762" bIns="762" rtlCol="0" anchor="ctr"/>
+          <a:bodyPr wrap="square" lIns="762" tIns="762" rIns="762" bIns="762" rtlCol="0" anchor="ctr">
+            <a:normAutofit/>
+          </a:bodyPr>
           <a:lstStyle/>
           <a:p>
             <a:pPr algn="ctr" indent="0" marL="0">
@@ -11179,7 +11301,9 @@
           <a:ln/>
         </p:spPr>
         <p:txBody>
-          <a:bodyPr wrap="square" lIns="762" tIns="762" rIns="762" bIns="762" rtlCol="0" anchor="ctr"/>
+          <a:bodyPr wrap="square" lIns="762" tIns="762" rIns="762" bIns="762" rtlCol="0" anchor="ctr">
+            <a:normAutofit/>
+          </a:bodyPr>
           <a:lstStyle/>
           <a:p>
             <a:pPr algn="ctr" indent="0" marL="0">
@@ -11265,7 +11389,9 @@
           <a:ln/>
         </p:spPr>
         <p:txBody>
-          <a:bodyPr wrap="square" lIns="762" tIns="762" rIns="762" bIns="762" rtlCol="0" anchor="ctr"/>
+          <a:bodyPr wrap="square" lIns="762" tIns="762" rIns="762" bIns="762" rtlCol="0" anchor="ctr">
+            <a:normAutofit/>
+          </a:bodyPr>
           <a:lstStyle/>
           <a:p>
             <a:pPr algn="ctr" indent="0" marL="0">
@@ -11351,7 +11477,9 @@
           <a:ln/>
         </p:spPr>
         <p:txBody>
-          <a:bodyPr wrap="square" lIns="762" tIns="762" rIns="762" bIns="762" rtlCol="0" anchor="ctr"/>
+          <a:bodyPr wrap="square" lIns="762" tIns="762" rIns="762" bIns="762" rtlCol="0" anchor="ctr">
+            <a:normAutofit/>
+          </a:bodyPr>
           <a:lstStyle/>
           <a:p>
             <a:pPr algn="ctr" indent="0" marL="0">
@@ -11456,7 +11584,9 @@
           <a:ln/>
         </p:spPr>
         <p:txBody>
-          <a:bodyPr wrap="square" lIns="762" tIns="762" rIns="762" bIns="762" rtlCol="0" anchor="ctr"/>
+          <a:bodyPr wrap="square" lIns="762" tIns="762" rIns="762" bIns="762" rtlCol="0" anchor="ctr">
+            <a:normAutofit/>
+          </a:bodyPr>
           <a:lstStyle/>
           <a:p>
             <a:pPr algn="ctr" indent="0" marL="0">
@@ -11542,7 +11672,9 @@
           <a:ln/>
         </p:spPr>
         <p:txBody>
-          <a:bodyPr wrap="square" lIns="762" tIns="762" rIns="762" bIns="762" rtlCol="0" anchor="ctr"/>
+          <a:bodyPr wrap="square" lIns="762" tIns="762" rIns="762" bIns="762" rtlCol="0" anchor="ctr">
+            <a:normAutofit/>
+          </a:bodyPr>
           <a:lstStyle/>
           <a:p>
             <a:pPr algn="ctr" indent="0" marL="0">
@@ -11628,7 +11760,9 @@
           <a:ln/>
         </p:spPr>
         <p:txBody>
-          <a:bodyPr wrap="square" lIns="762" tIns="762" rIns="762" bIns="762" rtlCol="0" anchor="ctr"/>
+          <a:bodyPr wrap="square" lIns="762" tIns="762" rIns="762" bIns="762" rtlCol="0" anchor="ctr">
+            <a:normAutofit/>
+          </a:bodyPr>
           <a:lstStyle/>
           <a:p>
             <a:pPr algn="ctr" indent="0" marL="0">
@@ -11714,7 +11848,9 @@
           <a:ln/>
         </p:spPr>
         <p:txBody>
-          <a:bodyPr wrap="square" lIns="762" tIns="762" rIns="762" bIns="762" rtlCol="0" anchor="ctr"/>
+          <a:bodyPr wrap="square" lIns="762" tIns="762" rIns="762" bIns="762" rtlCol="0" anchor="ctr">
+            <a:normAutofit/>
+          </a:bodyPr>
           <a:lstStyle/>
           <a:p>
             <a:pPr algn="ctr" indent="0" marL="0">
@@ -11732,7 +11868,7 @@
                 <a:ea typeface="Microsoft JhengHei" pitchFamily="34" charset="-122"/>
                 <a:cs typeface="Microsoft JhengHei" pitchFamily="34" charset="-120"/>
               </a:rPr>
-              <a:t>交 Aaron 付款</a:t>
+              <a:t>交 負責人 付款</a:t>
             </a:r>
             <a:endParaRPr lang="en-US" sz="1300" dirty="0"/>
           </a:p>
@@ -11767,11 +11903,11 @@
         <p:spPr>
           <a:xfrm>
             <a:off x="548640" y="5166360"/>
-            <a:ext cx="11091672" cy="502920"/>
+            <a:ext cx="11091672" cy="548640"/>
           </a:xfrm>
           <a:prstGeom prst="roundRect">
             <a:avLst>
-              <a:gd name="adj" fmla="val 10909"/>
+              <a:gd name="adj" fmla="val 10000"/>
             </a:avLst>
           </a:prstGeom>
           <a:solidFill>
@@ -11780,7 +11916,9 @@
           <a:ln/>
         </p:spPr>
         <p:txBody>
-          <a:bodyPr wrap="square" lIns="1524" tIns="1524" rIns="1524" bIns="1524" rtlCol="0" anchor="ctr"/>
+          <a:bodyPr wrap="square" lIns="1524" tIns="1524" rIns="1524" bIns="1524" rtlCol="0" anchor="ctr">
+            <a:normAutofit/>
+          </a:bodyPr>
           <a:lstStyle/>
           <a:p>
             <a:pPr algn="l" indent="0" marL="0">
@@ -11795,7 +11933,7 @@
                 <a:ea typeface="Microsoft JhengHei" pitchFamily="34" charset="-122"/>
                 <a:cs typeface="Microsoft JhengHei" pitchFamily="34" charset="-120"/>
               </a:rPr>
-              <a:t>原則:對帳差異當週查明,不跨月;查不明的差異列表報 Aaron,不自行調帳</a:t>
+              <a:t>原則:對帳差異當週查明,不跨月;查不明的差異列表報 負責人,不自行調帳</a:t>
             </a:r>
             <a:endParaRPr lang="en-US" sz="1200" dirty="0"/>
           </a:p>
@@ -11866,7 +12004,7 @@
                 <a:ea typeface="Microsoft JhengHei" pitchFamily="34" charset="-122"/>
                 <a:cs typeface="Microsoft JhengHei" pitchFamily="34" charset="-120"/>
               </a:rPr>
-              <a:t>小民|訂單處理流程</a:t>
+              <a:t>電商營運|訂單處理流程</a:t>
             </a:r>
             <a:endParaRPr lang="en-US" sz="2800" dirty="0"/>
           </a:p>
@@ -11905,7 +12043,7 @@
                 <a:ea typeface="Microsoft JhengHei" pitchFamily="34" charset="-122"/>
                 <a:cs typeface="Microsoft JhengHei" pitchFamily="34" charset="-120"/>
               </a:rPr>
-              <a:t>模組:銷貨管理|頻率:每日|代理:Maggie</a:t>
+              <a:t>模組:銷貨管理|頻率:每日|代理:後勤行政</a:t>
             </a:r>
             <a:endParaRPr lang="en-US" sz="1200" dirty="0"/>
           </a:p>
@@ -11933,7 +12071,9 @@
           <a:ln/>
         </p:spPr>
         <p:txBody>
-          <a:bodyPr wrap="square" lIns="762" tIns="762" rIns="762" bIns="762" rtlCol="0" anchor="ctr"/>
+          <a:bodyPr wrap="square" lIns="762" tIns="762" rIns="762" bIns="762" rtlCol="0" anchor="ctr">
+            <a:normAutofit/>
+          </a:bodyPr>
           <a:lstStyle/>
           <a:p>
             <a:pPr algn="ctr" indent="0" marL="0">
@@ -12019,7 +12159,9 @@
           <a:ln/>
         </p:spPr>
         <p:txBody>
-          <a:bodyPr wrap="square" lIns="762" tIns="762" rIns="762" bIns="762" rtlCol="0" anchor="ctr"/>
+          <a:bodyPr wrap="square" lIns="762" tIns="762" rIns="762" bIns="762" rtlCol="0" anchor="ctr">
+            <a:normAutofit/>
+          </a:bodyPr>
           <a:lstStyle/>
           <a:p>
             <a:pPr algn="ctr" indent="0" marL="0">
@@ -12105,7 +12247,9 @@
           <a:ln/>
         </p:spPr>
         <p:txBody>
-          <a:bodyPr wrap="square" lIns="762" tIns="762" rIns="762" bIns="762" rtlCol="0" anchor="ctr"/>
+          <a:bodyPr wrap="square" lIns="762" tIns="762" rIns="762" bIns="762" rtlCol="0" anchor="ctr">
+            <a:normAutofit/>
+          </a:bodyPr>
           <a:lstStyle/>
           <a:p>
             <a:pPr algn="ctr" indent="0" marL="0">
@@ -12191,7 +12335,9 @@
           <a:ln/>
         </p:spPr>
         <p:txBody>
-          <a:bodyPr wrap="square" lIns="762" tIns="762" rIns="762" bIns="762" rtlCol="0" anchor="ctr"/>
+          <a:bodyPr wrap="square" lIns="762" tIns="762" rIns="762" bIns="762" rtlCol="0" anchor="ctr">
+            <a:normAutofit/>
+          </a:bodyPr>
           <a:lstStyle/>
           <a:p>
             <a:pPr algn="ctr" indent="0" marL="0">
@@ -12229,7 +12375,7 @@
                 <a:ea typeface="Microsoft JhengHei" pitchFamily="34" charset="-122"/>
                 <a:cs typeface="Microsoft JhengHei" pitchFamily="34" charset="-120"/>
               </a:rPr>
-              <a:t>彙整當日清單交 Abby</a:t>
+              <a:t>彙整當日清單交 倉儲</a:t>
             </a:r>
             <a:endParaRPr lang="en-US" sz="1300" dirty="0"/>
           </a:p>
@@ -12277,7 +12423,9 @@
           <a:ln/>
         </p:spPr>
         <p:txBody>
-          <a:bodyPr wrap="square" lIns="762" tIns="762" rIns="762" bIns="762" rtlCol="0" anchor="ctr"/>
+          <a:bodyPr wrap="square" lIns="762" tIns="762" rIns="762" bIns="762" rtlCol="0" anchor="ctr">
+            <a:normAutofit/>
+          </a:bodyPr>
           <a:lstStyle/>
           <a:p>
             <a:pPr algn="ctr" indent="0" marL="0">
@@ -12343,7 +12491,9 @@
           <a:ln/>
         </p:spPr>
         <p:txBody>
-          <a:bodyPr wrap="square" lIns="2286" tIns="2286" rIns="2286" bIns="2286" rtlCol="0" anchor="t"/>
+          <a:bodyPr wrap="square" lIns="2286" tIns="2286" rIns="2286" bIns="2286" rtlCol="0" anchor="t">
+            <a:normAutofit/>
+          </a:bodyPr>
           <a:lstStyle/>
           <a:p>
             <a:pPr indent="0" marL="0">
@@ -12382,7 +12532,7 @@
                 <a:ea typeface="Microsoft JhengHei" pitchFamily="34" charset="-122"/>
                 <a:cs typeface="Microsoft JhengHei" pitchFamily="34" charset="-120"/>
               </a:rPr>
-              <a:t>缺貨:先通知顧客延遲與預計日,同步回報 Maggie 補採購;顧客不等→取消退款</a:t>
+              <a:t>缺貨:先通知顧客延遲與預計日,同步回報 後勤行政 補採購;顧客不等→取消退款</a:t>
             </a:r>
             <a:endParaRPr lang="en-US" sz="1400" dirty="0"/>
           </a:p>
@@ -12436,11 +12586,11 @@
         <p:spPr>
           <a:xfrm>
             <a:off x="548640" y="5349240"/>
-            <a:ext cx="11091672" cy="502920"/>
+            <a:ext cx="11091672" cy="548640"/>
           </a:xfrm>
           <a:prstGeom prst="roundRect">
             <a:avLst>
-              <a:gd name="adj" fmla="val 10909"/>
+              <a:gd name="adj" fmla="val 10000"/>
             </a:avLst>
           </a:prstGeom>
           <a:solidFill>
@@ -12449,7 +12599,9 @@
           <a:ln/>
         </p:spPr>
         <p:txBody>
-          <a:bodyPr wrap="square" lIns="1524" tIns="1524" rIns="1524" bIns="1524" rtlCol="0" anchor="ctr"/>
+          <a:bodyPr wrap="square" lIns="1524" tIns="1524" rIns="1524" bIns="1524" rtlCol="0" anchor="ctr">
+            <a:normAutofit/>
+          </a:bodyPr>
           <a:lstStyle/>
           <a:p>
             <a:pPr algn="l" indent="0" marL="0">
@@ -12535,7 +12687,7 @@
                 <a:ea typeface="Microsoft JhengHei" pitchFamily="34" charset="-122"/>
                 <a:cs typeface="Microsoft JhengHei" pitchFamily="34" charset="-120"/>
               </a:rPr>
-              <a:t>Abby|收貨入庫流程</a:t>
+              <a:t>倉儲|收貨入庫流程</a:t>
             </a:r>
             <a:endParaRPr lang="en-US" sz="2800" dirty="0"/>
           </a:p>
@@ -12574,7 +12726,7 @@
                 <a:ea typeface="Microsoft JhengHei" pitchFamily="34" charset="-122"/>
                 <a:cs typeface="Microsoft JhengHei" pitchFamily="34" charset="-120"/>
               </a:rPr>
-              <a:t>模組:庫存管理/採購進貨|頻率:每日|代理:Una(點收)、Maggie(系統)</a:t>
+              <a:t>模組:庫存管理/採購進貨|頻率:每日|代理:行政協助(點收)、後勤行政(系統)</a:t>
             </a:r>
             <a:endParaRPr lang="en-US" sz="1200" dirty="0"/>
           </a:p>
@@ -12602,7 +12754,9 @@
           <a:ln/>
         </p:spPr>
         <p:txBody>
-          <a:bodyPr wrap="square" lIns="762" tIns="762" rIns="762" bIns="762" rtlCol="0" anchor="ctr"/>
+          <a:bodyPr wrap="square" lIns="762" tIns="762" rIns="762" bIns="762" rtlCol="0" anchor="ctr">
+            <a:normAutofit/>
+          </a:bodyPr>
           <a:lstStyle/>
           <a:p>
             <a:pPr algn="ctr" indent="0" marL="0">
@@ -12640,7 +12794,7 @@
                 <a:ea typeface="Microsoft JhengHei" pitchFamily="34" charset="-122"/>
                 <a:cs typeface="Microsoft JhengHei" pitchFamily="34" charset="-120"/>
               </a:rPr>
-              <a:t>依 Maggie 到貨通知準備</a:t>
+              <a:t>依 後勤行政 到貨通知準備</a:t>
             </a:r>
             <a:endParaRPr lang="en-US" sz="1300" dirty="0"/>
           </a:p>
@@ -12688,7 +12842,9 @@
           <a:ln/>
         </p:spPr>
         <p:txBody>
-          <a:bodyPr wrap="square" lIns="762" tIns="762" rIns="762" bIns="762" rtlCol="0" anchor="ctr"/>
+          <a:bodyPr wrap="square" lIns="762" tIns="762" rIns="762" bIns="762" rtlCol="0" anchor="ctr">
+            <a:normAutofit/>
+          </a:bodyPr>
           <a:lstStyle/>
           <a:p>
             <a:pPr algn="ctr" indent="0" marL="0">
@@ -12774,7 +12930,9 @@
           <a:ln/>
         </p:spPr>
         <p:txBody>
-          <a:bodyPr wrap="square" lIns="762" tIns="762" rIns="762" bIns="762" rtlCol="0" anchor="ctr"/>
+          <a:bodyPr wrap="square" lIns="762" tIns="762" rIns="762" bIns="762" rtlCol="0" anchor="ctr">
+            <a:normAutofit/>
+          </a:bodyPr>
           <a:lstStyle/>
           <a:p>
             <a:pPr algn="ctr" indent="0" marL="0">
@@ -12812,7 +12970,7 @@
                 <a:ea typeface="Microsoft JhengHei" pitchFamily="34" charset="-122"/>
                 <a:cs typeface="Microsoft JhengHei" pitchFamily="34" charset="-120"/>
               </a:rPr>
-              <a:t>短交/溢交/損傷→拍照通知 Maggie</a:t>
+              <a:t>短交/溢交/損傷→拍照通知 後勤行政</a:t>
             </a:r>
             <a:endParaRPr lang="en-US" sz="1300" dirty="0"/>
           </a:p>
@@ -12860,7 +13018,9 @@
           <a:ln/>
         </p:spPr>
         <p:txBody>
-          <a:bodyPr wrap="square" lIns="762" tIns="762" rIns="762" bIns="762" rtlCol="0" anchor="ctr"/>
+          <a:bodyPr wrap="square" lIns="762" tIns="762" rIns="762" bIns="762" rtlCol="0" anchor="ctr">
+            <a:normAutofit/>
+          </a:bodyPr>
           <a:lstStyle/>
           <a:p>
             <a:pPr algn="ctr" indent="0" marL="0">
@@ -12946,7 +13106,9 @@
           <a:ln/>
         </p:spPr>
         <p:txBody>
-          <a:bodyPr wrap="square" lIns="762" tIns="762" rIns="762" bIns="762" rtlCol="0" anchor="ctr"/>
+          <a:bodyPr wrap="square" lIns="762" tIns="762" rIns="762" bIns="762" rtlCol="0" anchor="ctr">
+            <a:normAutofit/>
+          </a:bodyPr>
           <a:lstStyle/>
           <a:p>
             <a:pPr algn="ctr" indent="0" marL="0">
@@ -12984,7 +13146,7 @@
                 <a:ea typeface="Microsoft JhengHei" pitchFamily="34" charset="-122"/>
                 <a:cs typeface="Microsoft JhengHei" pitchFamily="34" charset="-120"/>
               </a:rPr>
-              <a:t>簽收單據交 Maggie 對帳用</a:t>
+              <a:t>簽收單據交 後勤行政 對帳用</a:t>
             </a:r>
             <a:endParaRPr lang="en-US" sz="1300" dirty="0"/>
           </a:p>
@@ -13012,7 +13174,9 @@
           <a:ln/>
         </p:spPr>
         <p:txBody>
-          <a:bodyPr wrap="square" lIns="2286" tIns="2286" rIns="2286" bIns="2286" rtlCol="0" anchor="t"/>
+          <a:bodyPr wrap="square" lIns="2286" tIns="2286" rIns="2286" bIns="2286" rtlCol="0" anchor="t">
+            <a:normAutofit/>
+          </a:bodyPr>
           <a:lstStyle/>
           <a:p>
             <a:pPr indent="0" marL="0">
@@ -13118,7 +13282,9 @@
           <a:ln/>
         </p:spPr>
         <p:txBody>
-          <a:bodyPr wrap="square" lIns="2286" tIns="2286" rIns="2286" bIns="2286" rtlCol="0" anchor="t"/>
+          <a:bodyPr wrap="square" lIns="2286" tIns="2286" rIns="2286" bIns="2286" rtlCol="0" anchor="t">
+            <a:normAutofit/>
+          </a:bodyPr>
           <a:lstStyle/>
           <a:p>
             <a:pPr indent="0" marL="0">
@@ -13196,7 +13362,7 @@
                 <a:ea typeface="Microsoft JhengHei" pitchFamily="34" charset="-122"/>
                 <a:cs typeface="Microsoft JhengHei" pitchFamily="34" charset="-120"/>
               </a:rPr>
-              <a:t>新品項無儲位→問 Maggie/依配置圖規則新增</a:t>
+              <a:t>新品項無儲位→問 後勤行政/依配置圖規則新增</a:t>
             </a:r>
             <a:endParaRPr lang="en-US" sz="1400" dirty="0"/>
           </a:p>
@@ -13267,7 +13433,7 @@
                 <a:ea typeface="Microsoft JhengHei" pitchFamily="34" charset="-122"/>
                 <a:cs typeface="Microsoft JhengHei" pitchFamily="34" charset="-120"/>
               </a:rPr>
-              <a:t>Abby|出貨與退貨流程</a:t>
+              <a:t>倉儲|出貨與退貨流程</a:t>
             </a:r>
             <a:endParaRPr lang="en-US" sz="2800" dirty="0"/>
           </a:p>
@@ -13306,7 +13472,7 @@
                 <a:ea typeface="Microsoft JhengHei" pitchFamily="34" charset="-122"/>
                 <a:cs typeface="Microsoft JhengHei" pitchFamily="34" charset="-120"/>
               </a:rPr>
-              <a:t>模組:銷貨出貨/銷貨退回|頻率:每日|代理:Una(揀包)、Maggie(系統)</a:t>
+              <a:t>模組:銷貨出貨/銷貨退回|頻率:每日|代理:行政協助(揀包)、後勤行政(系統)</a:t>
             </a:r>
             <a:endParaRPr lang="en-US" sz="1200" dirty="0"/>
           </a:p>
@@ -13373,7 +13539,9 @@
           <a:ln/>
         </p:spPr>
         <p:txBody>
-          <a:bodyPr wrap="square" lIns="762" tIns="762" rIns="762" bIns="762" rtlCol="0" anchor="ctr"/>
+          <a:bodyPr wrap="square" lIns="762" tIns="762" rIns="762" bIns="762" rtlCol="0" anchor="ctr">
+            <a:normAutofit/>
+          </a:bodyPr>
           <a:lstStyle/>
           <a:p>
             <a:pPr algn="ctr" indent="0" marL="0">
@@ -13411,7 +13579,7 @@
                 <a:ea typeface="Microsoft JhengHei" pitchFamily="34" charset="-122"/>
                 <a:cs typeface="Microsoft JhengHei" pitchFamily="34" charset="-120"/>
               </a:rPr>
-              <a:t>小民彙整之當日清單</a:t>
+              <a:t>電商營運彙整之當日清單</a:t>
             </a:r>
             <a:endParaRPr lang="en-US" sz="1300" dirty="0"/>
           </a:p>
@@ -13459,7 +13627,9 @@
           <a:ln/>
         </p:spPr>
         <p:txBody>
-          <a:bodyPr wrap="square" lIns="762" tIns="762" rIns="762" bIns="762" rtlCol="0" anchor="ctr"/>
+          <a:bodyPr wrap="square" lIns="762" tIns="762" rIns="762" bIns="762" rtlCol="0" anchor="ctr">
+            <a:normAutofit/>
+          </a:bodyPr>
           <a:lstStyle/>
           <a:p>
             <a:pPr algn="ctr" indent="0" marL="0">
@@ -13545,7 +13715,9 @@
           <a:ln/>
         </p:spPr>
         <p:txBody>
-          <a:bodyPr wrap="square" lIns="762" tIns="762" rIns="762" bIns="762" rtlCol="0" anchor="ctr"/>
+          <a:bodyPr wrap="square" lIns="762" tIns="762" rIns="762" bIns="762" rtlCol="0" anchor="ctr">
+            <a:normAutofit/>
+          </a:bodyPr>
           <a:lstStyle/>
           <a:p>
             <a:pPr algn="ctr" indent="0" marL="0">
@@ -13631,7 +13803,9 @@
           <a:ln/>
         </p:spPr>
         <p:txBody>
-          <a:bodyPr wrap="square" lIns="762" tIns="762" rIns="762" bIns="762" rtlCol="0" anchor="ctr"/>
+          <a:bodyPr wrap="square" lIns="762" tIns="762" rIns="762" bIns="762" rtlCol="0" anchor="ctr">
+            <a:normAutofit/>
+          </a:bodyPr>
           <a:lstStyle/>
           <a:p>
             <a:pPr algn="ctr" indent="0" marL="0">
@@ -13717,7 +13891,9 @@
           <a:ln/>
         </p:spPr>
         <p:txBody>
-          <a:bodyPr wrap="square" lIns="762" tIns="762" rIns="762" bIns="762" rtlCol="0" anchor="ctr"/>
+          <a:bodyPr wrap="square" lIns="762" tIns="762" rIns="762" bIns="762" rtlCol="0" anchor="ctr">
+            <a:normAutofit/>
+          </a:bodyPr>
           <a:lstStyle/>
           <a:p>
             <a:pPr algn="ctr" indent="0" marL="0">
@@ -13822,7 +13998,9 @@
           <a:ln/>
         </p:spPr>
         <p:txBody>
-          <a:bodyPr wrap="square" lIns="762" tIns="762" rIns="762" bIns="762" rtlCol="0" anchor="ctr"/>
+          <a:bodyPr wrap="square" lIns="762" tIns="762" rIns="762" bIns="762" rtlCol="0" anchor="ctr">
+            <a:normAutofit/>
+          </a:bodyPr>
           <a:lstStyle/>
           <a:p>
             <a:pPr algn="ctr" indent="0" marL="0">
@@ -13908,7 +14086,9 @@
           <a:ln/>
         </p:spPr>
         <p:txBody>
-          <a:bodyPr wrap="square" lIns="762" tIns="762" rIns="762" bIns="762" rtlCol="0" anchor="ctr"/>
+          <a:bodyPr wrap="square" lIns="762" tIns="762" rIns="762" bIns="762" rtlCol="0" anchor="ctr">
+            <a:normAutofit/>
+          </a:bodyPr>
           <a:lstStyle/>
           <a:p>
             <a:pPr algn="ctr" indent="0" marL="0">
@@ -13994,7 +14174,9 @@
           <a:ln/>
         </p:spPr>
         <p:txBody>
-          <a:bodyPr wrap="square" lIns="762" tIns="762" rIns="762" bIns="762" rtlCol="0" anchor="ctr"/>
+          <a:bodyPr wrap="square" lIns="762" tIns="762" rIns="762" bIns="762" rtlCol="0" anchor="ctr">
+            <a:normAutofit/>
+          </a:bodyPr>
           <a:lstStyle/>
           <a:p>
             <a:pPr algn="ctr" indent="0" marL="0">
@@ -14080,7 +14262,9 @@
           <a:ln/>
         </p:spPr>
         <p:txBody>
-          <a:bodyPr wrap="square" lIns="762" tIns="762" rIns="762" bIns="762" rtlCol="0" anchor="ctr"/>
+          <a:bodyPr wrap="square" lIns="762" tIns="762" rIns="762" bIns="762" rtlCol="0" anchor="ctr">
+            <a:normAutofit/>
+          </a:bodyPr>
           <a:lstStyle/>
           <a:p>
             <a:pPr algn="ctr" indent="0" marL="0">
@@ -14118,7 +14302,7 @@
                 <a:ea typeface="Microsoft JhengHei" pitchFamily="34" charset="-122"/>
                 <a:cs typeface="Microsoft JhengHei" pitchFamily="34" charset="-120"/>
               </a:rPr>
-              <a:t>狀況爭議→Maggie 二線判定</a:t>
+              <a:t>狀況爭議→後勤行政 二線判定</a:t>
             </a:r>
             <a:endParaRPr lang="en-US" sz="1300" dirty="0"/>
           </a:p>
@@ -14133,11 +14317,11 @@
         <p:spPr>
           <a:xfrm>
             <a:off x="548640" y="5166360"/>
-            <a:ext cx="11091672" cy="502920"/>
+            <a:ext cx="11091672" cy="548640"/>
           </a:xfrm>
           <a:prstGeom prst="roundRect">
             <a:avLst>
-              <a:gd name="adj" fmla="val 10909"/>
+              <a:gd name="adj" fmla="val 10000"/>
             </a:avLst>
           </a:prstGeom>
           <a:solidFill>
@@ -14146,7 +14330,9 @@
           <a:ln/>
         </p:spPr>
         <p:txBody>
-          <a:bodyPr wrap="square" lIns="1524" tIns="1524" rIns="1524" bIns="1524" rtlCol="0" anchor="ctr"/>
+          <a:bodyPr wrap="square" lIns="1524" tIns="1524" rIns="1524" bIns="1524" rtlCol="0" anchor="ctr">
+            <a:normAutofit/>
+          </a:bodyPr>
           <a:lstStyle/>
           <a:p>
             <a:pPr algn="l" indent="0" marL="0">
@@ -14161,7 +14347,7 @@
                 <a:ea typeface="Microsoft JhengHei" pitchFamily="34" charset="-122"/>
                 <a:cs typeface="Microsoft JhengHei" pitchFamily="34" charset="-120"/>
               </a:rPr>
-              <a:t>鐵律:實物動,系統就要動——揀錯補改單、破損報廢開調整單(Maggie 覆核),庫存帳與實物永遠一致</a:t>
+              <a:t>鐵律:實物動,系統就要動——揀錯補改單、破損報廢開調整單(後勤行政 覆核),庫存帳與實物永遠一致</a:t>
             </a:r>
             <a:endParaRPr lang="en-US" sz="1200" dirty="0"/>
           </a:p>
